--- a/website/public/generated/Nasr-city-Tunnel/02_master_dashboard.pptx
+++ b/website/public/generated/Nasr-city-Tunnel/02_master_dashboard.pptx
@@ -3856,7 +3856,7 @@
               </a:defRPr>
             </a:pPr>
             <a:r>
-              <a:t>Generated 05 Aug 2026 | Source-controlled selected-project output</a:t>
+              <a:t>Generated 09 Aug 2026 | Source-controlled selected-project output</a:t>
             </a:r>
           </a:p>
         </p:txBody>

--- a/website/public/generated/Nasr-city-Tunnel/02_master_dashboard.pptx
+++ b/website/public/generated/Nasr-city-Tunnel/02_master_dashboard.pptx
@@ -3856,7 +3856,7 @@
               </a:defRPr>
             </a:pPr>
             <a:r>
-              <a:t>Generated 09 Aug 2026 | Source-controlled selected-project output</a:t>
+              <a:t>Generated 13 Aug 2026 | Source-controlled selected-project output</a:t>
             </a:r>
           </a:p>
         </p:txBody>

--- a/website/public/generated/Nasr-city-Tunnel/02_master_dashboard.pptx
+++ b/website/public/generated/Nasr-city-Tunnel/02_master_dashboard.pptx
@@ -3425,7 +3425,7 @@
               </a:defRPr>
             </a:pPr>
             <a:r>
-              <a:t>Delayed</a:t>
+              <a:t>Active</a:t>
             </a:r>
           </a:p>
         </p:txBody>
@@ -3491,7 +3491,7 @@
               </a:defRPr>
             </a:pPr>
             <a:r>
-              <a:t>EGP 1,845,000,000</a:t>
+              <a:t>N/A</a:t>
             </a:r>
           </a:p>
         </p:txBody>
@@ -3557,7 +3557,7 @@
               </a:defRPr>
             </a:pPr>
             <a:r>
-              <a:t>EGP 177,050,000</a:t>
+              <a:t>N/A</a:t>
             </a:r>
           </a:p>
         </p:txBody>
@@ -3623,7 +3623,7 @@
               </a:defRPr>
             </a:pPr>
             <a:r>
-              <a:t>26.8%</a:t>
+              <a:t>N/A</a:t>
             </a:r>
           </a:p>
         </p:txBody>
@@ -3689,7 +3689,7 @@
               </a:defRPr>
             </a:pPr>
             <a:r>
-              <a:t>31.5%</a:t>
+              <a:t>N/A</a:t>
             </a:r>
           </a:p>
         </p:txBody>
@@ -3755,7 +3755,7 @@
               </a:defRPr>
             </a:pPr>
             <a:r>
-              <a:t>EGP 199,500,000 / EGP 199,500,000 / EGP 196,112,167 / EGP 206,786,157</a:t>
+              <a:t>N/A / N/A / N/A / N/A</a:t>
             </a:r>
           </a:p>
         </p:txBody>
@@ -3821,7 +3821,7 @@
               </a:defRPr>
             </a:pPr>
             <a:r>
-              <a:t>0.98 / 0.95</a:t>
+              <a:t>N/A / N/A</a:t>
             </a:r>
           </a:p>
         </p:txBody>
@@ -3856,7 +3856,7 @@
               </a:defRPr>
             </a:pPr>
             <a:r>
-              <a:t>Generated 13 Aug 2026 | Source-controlled selected-project output</a:t>
+              <a:t>Generated 15 Aug 2026 | Source-controlled selected-project output</a:t>
             </a:r>
           </a:p>
         </p:txBody>

--- a/website/public/generated/Nasr-city-Tunnel/02_master_dashboard.pptx
+++ b/website/public/generated/Nasr-city-Tunnel/02_master_dashboard.pptx
@@ -3425,7 +3425,7 @@
               </a:defRPr>
             </a:pPr>
             <a:r>
-              <a:t>Active</a:t>
+              <a:t>Delayed</a:t>
             </a:r>
           </a:p>
         </p:txBody>
@@ -3491,7 +3491,7 @@
               </a:defRPr>
             </a:pPr>
             <a:r>
-              <a:t>N/A</a:t>
+              <a:t>EGP 1,845,000,000</a:t>
             </a:r>
           </a:p>
         </p:txBody>
@@ -3557,7 +3557,7 @@
               </a:defRPr>
             </a:pPr>
             <a:r>
-              <a:t>N/A</a:t>
+              <a:t>EGP 177,050,000</a:t>
             </a:r>
           </a:p>
         </p:txBody>
@@ -3623,7 +3623,7 @@
               </a:defRPr>
             </a:pPr>
             <a:r>
-              <a:t>N/A</a:t>
+              <a:t>26.8%</a:t>
             </a:r>
           </a:p>
         </p:txBody>
@@ -3689,7 +3689,7 @@
               </a:defRPr>
             </a:pPr>
             <a:r>
-              <a:t>N/A</a:t>
+              <a:t>31.5%</a:t>
             </a:r>
           </a:p>
         </p:txBody>
@@ -3755,7 +3755,7 @@
               </a:defRPr>
             </a:pPr>
             <a:r>
-              <a:t>N/A / N/A / N/A / N/A</a:t>
+              <a:t>EGP 199,500,000 / EGP 199,500,000 / EGP 196,112,167 / EGP 206,786,157</a:t>
             </a:r>
           </a:p>
         </p:txBody>
@@ -3821,7 +3821,7 @@
               </a:defRPr>
             </a:pPr>
             <a:r>
-              <a:t>N/A / N/A</a:t>
+              <a:t>0.98 / 0.95</a:t>
             </a:r>
           </a:p>
         </p:txBody>
@@ -3856,7 +3856,7 @@
               </a:defRPr>
             </a:pPr>
             <a:r>
-              <a:t>Generated 15 Aug 2026 | Source-controlled selected-project output</a:t>
+              <a:t>Generated 20 Aug 2026 | Source-controlled selected-project output</a:t>
             </a:r>
           </a:p>
         </p:txBody>

--- a/website/public/generated/Nasr-city-Tunnel/02_master_dashboard.pptx
+++ b/website/public/generated/Nasr-city-Tunnel/02_master_dashboard.pptx
@@ -3856,7 +3856,7 @@
               </a:defRPr>
             </a:pPr>
             <a:r>
-              <a:t>Generated 20 Aug 2026 | Source-controlled selected-project output</a:t>
+              <a:t>Generated 22 Aug 2026 | Source-controlled selected-project output</a:t>
             </a:r>
           </a:p>
         </p:txBody>
